--- a/Lesson22-FunctionFilters/Lesson22-FunctionFilters.pptx
+++ b/Lesson22-FunctionFilters/Lesson22-FunctionFilters.pptx
@@ -862,7 +862,7 @@
           <a:p>
             <a:r>
               <a:rPr lang="en-US" dirty="0"/>
-              <a:t>Both filters follow the same pattern. Each receives a context and a delegate called next. Code before await next runs before the real operation; code after it runs once the operation has finished. AuditFunctionFilter starts a Stopwatch and logs the requested plugin before next, then logs the function name, the duration and the result after it. PromptLoggingFilter calls next first, because the prompt only exists after rendering, and then prints context.RenderedPrompt. The third option is the powerful one: because the filter decides whether next is ever called, it can veto an operation entirely, for example by setting context.Result itself or throwing, so a sensitive plugin never runs. That is the hook security gates are built on.</a:t>
+              <a:t>Both filters follow the same pattern. Each receives a context and a delegate called next. Code before await next runs before the real operation; code after it runs once the operation has finished. AuditFunctionFilter starts a Stopwatch and logs the requested plugin and function name before next, then logs the same identifier with the duration and the result after it. PromptLoggingFilter calls next first, because the prompt only exists after rendering, and then prints context.RenderedPrompt. The third option is the powerful one: because the filter decides whether next is ever called, it can veto an operation entirely, for example by setting context.Result itself or throwing, so a sensitive plugin never runs. That is the hook security gates are built on.</a:t>
             </a:r>
             <a:endParaRPr lang="en-US" dirty="0"/>
           </a:p>
@@ -1038,7 +1038,7 @@
           <a:p>
             <a:r>
               <a:rPr lang="en-US" dirty="0"/>
-              <a:t>Run the project with OPENAI_API_KEY set. This slide is trimmed of blank lines, and the durations, the generated function id and the model's wording are illustrative. Read it top to bottom. The first audit line comes from the function filter wrapping the prompt itself; a prompt function has no plugin, so its plugin name prints empty. Inside it, the prompt logger shows the exact text sent to the model. Then the inner pair: the audit filter logs that the Database plugin was requested, the plugin prints the balance, and the filter reports GetCustomerBalance's duration, a little over the 400 millisecond delay, and its result. Finally the outer pair closes, with the model's answer as its result, and the program prints the final response. Note the small inconsistency in the audit lines: the opening line logs the plugin name and the closing line logs the function name.</a:t>
+              <a:t>Run the project with OPENAI_API_KEY set. This slide is trimmed of blank lines, and the durations, the generated function id and the model's wording are illustrative. Read it top to bottom. The first audit line comes from the function filter wrapping the prompt itself; a prompt function has no plugin, so the filter prints just its generated name, InvokePromptAsync followed by an id. Inside it, the prompt logger shows the exact text sent to the model. Then the inner pair: the audit filter logs that Database.GetCustomerBalance was requested, the plugin prints the balance, and the filter reports the same function's duration, a little over the 400 millisecond delay, and its result. Finally the outer pair closes, with the model's answer as its result, and the program prints the final response. Each opening and closing audit line names the same function, so the pairs are easy to match up. The prompt filter fires only once: the tool result goes back to the model inside the chat history, and the prompt is not rendered again.</a:t>
             </a:r>
             <a:endParaRPr lang="en-US" dirty="0"/>
           </a:p>
@@ -5432,7 +5432,7 @@
                 <a:ea typeface="Calibri" pitchFamily="34" charset="-122"/>
                 <a:cs typeface="Calibri" pitchFamily="34" charset="-120"/>
               </a:rPr>
-              <a:t>Start the Stopwatch; log which plugin was requested.</a:t>
+              <a:t>Start the Stopwatch; log the plugin and function requested.</a:t>
             </a:r>
             <a:endParaRPr lang="en-US" sz="1200" dirty="0"/>
           </a:p>
@@ -6925,7 +6925,7 @@
                 <a:ea typeface="Courier New" pitchFamily="34" charset="-122"/>
                 <a:cs typeface="Courier New" pitchFamily="34" charset="-120"/>
               </a:rPr>
-              <a:t>[AUDIT] AI requested tool execution:</a:t>
+              <a:t>[AUDIT] Function requested: InvokePromptAsync_&lt;id&gt;</a:t>
             </a:r>
             <a:endParaRPr lang="en-US" sz="1050" dirty="0"/>
           </a:p>
@@ -6976,7 +6976,7 @@
                 <a:ea typeface="Courier New" pitchFamily="34" charset="-122"/>
                 <a:cs typeface="Courier New" pitchFamily="34" charset="-120"/>
               </a:rPr>
-              <a:t>[AUDIT] AI requested tool execution: Database</a:t>
+              <a:t>[AUDIT] Function requested: Database.GetCustomerBalance</a:t>
             </a:r>
             <a:endParaRPr lang="en-US" sz="1050" dirty="0"/>
           </a:p>
@@ -7010,7 +7010,7 @@
                 <a:ea typeface="Courier New" pitchFamily="34" charset="-122"/>
                 <a:cs typeface="Courier New" pitchFamily="34" charset="-120"/>
               </a:rPr>
-              <a:t>[AUDIT] Finished GetCustomerBalance, Duration: 405ms</a:t>
+              <a:t>[AUDIT] Finished Database.GetCustomerBalance, Duration: 405ms</a:t>
             </a:r>
             <a:endParaRPr lang="en-US" sz="1050" dirty="0"/>
           </a:p>
@@ -7027,7 +7027,7 @@
                 <a:ea typeface="Courier New" pitchFamily="34" charset="-122"/>
                 <a:cs typeface="Courier New" pitchFamily="34" charset="-120"/>
               </a:rPr>
-              <a:t>[AUDIT] Tool returned: $5,240</a:t>
+              <a:t>[AUDIT] Function returned: $5,240</a:t>
             </a:r>
             <a:endParaRPr lang="en-US" sz="1050" dirty="0"/>
           </a:p>
@@ -7044,7 +7044,7 @@
                 <a:ea typeface="Courier New" pitchFamily="34" charset="-122"/>
                 <a:cs typeface="Courier New" pitchFamily="34" charset="-120"/>
               </a:rPr>
-              <a:t>[AUDIT] Finished func&lt;random id&gt;, Duration: 2210ms</a:t>
+              <a:t>[AUDIT] Finished InvokePromptAsync_&lt;id&gt;, Duration: 2210ms</a:t>
             </a:r>
             <a:endParaRPr lang="en-US" sz="1050" dirty="0"/>
           </a:p>
@@ -7061,7 +7061,7 @@
                 <a:ea typeface="Courier New" pitchFamily="34" charset="-122"/>
                 <a:cs typeface="Courier New" pitchFamily="34" charset="-120"/>
               </a:rPr>
-              <a:t>[AUDIT] Tool returned: The balance for CUST-778 is $5,240.</a:t>
+              <a:t>[AUDIT] Function returned: The balance is $5,240.</a:t>
             </a:r>
             <a:endParaRPr lang="en-US" sz="1050" dirty="0"/>
           </a:p>
@@ -7078,7 +7078,7 @@
                 <a:ea typeface="Courier New" pitchFamily="34" charset="-122"/>
                 <a:cs typeface="Courier New" pitchFamily="34" charset="-120"/>
               </a:rPr>
-              <a:t>[AI FINAL RESPONSE]: The balance for CUST-778 is $5,240.</a:t>
+              <a:t>[AI FINAL RESPONSE]: The balance is $5,240.</a:t>
             </a:r>
             <a:endParaRPr lang="en-US" sz="1050" dirty="0"/>
           </a:p>
@@ -7420,7 +7420,7 @@
                 <a:ea typeface="Calibri" pitchFamily="34" charset="-122"/>
                 <a:cs typeface="Calibri" pitchFamily="34" charset="-120"/>
               </a:rPr>
-              <a:t>Name mismatch</a:t>
+              <a:t>Same identifier</a:t>
             </a:r>
             <a:endParaRPr lang="en-US" sz="1400" dirty="0"/>
           </a:p>
@@ -7459,7 +7459,7 @@
                 <a:ea typeface="Calibri" pitchFamily="34" charset="-122"/>
                 <a:cs typeface="Calibri" pitchFamily="34" charset="-120"/>
               </a:rPr>
-              <a:t>The first line logs PluginName, the second logs Name.</a:t>
+              <a:t>Opening and closing lines both name the function.</a:t>
             </a:r>
             <a:endParaRPr lang="en-US" sz="1200" dirty="0"/>
           </a:p>
